--- a/output/hackathon-flexclip-en/flexclip-v4/NeonShift_FlexClip_v4_EN.pptx
+++ b/output/hackathon-flexclip-en/flexclip-v4/NeonShift_FlexClip_v4_EN.pptx
@@ -15,6 +15,7 @@
     <p:sldId id="263" r:id="rId15"/>
     <p:sldId id="264" r:id="rId16"/>
     <p:sldId id="265" r:id="rId17"/>
+    <p:sldId id="266" r:id="rId18"/>
   </p:sldIdLst>
   <p:sldSz cx="12191999" cy="6858000" type="screen4x3"/>
   <p:notesSz cx="6858000" cy="9144000"/>
@@ -581,7 +582,77 @@
           <a:lstStyle/>
           <a:p>
             <a:r>
-              <a:t>No partnership or donation is claimed. Explore the Android app, source code, and reviewer guide through the submission links. Move for yourself. Move together for nature.</a:t>
+              <a:t>Next, stake SKR to boost mission rewards, with higher boosts at higher shoe levels. A fixed share of staking rewards will fund a separately tracked wildlife conservation pool. Rates are not final.</a:t>
+            </a:r>
+          </a:p>
+        </p:txBody>
+      </p:sp>
+      <p:sp>
+        <p:nvSpPr>
+          <p:cNvPr id="4" name="Slide Number Placeholder 3"/>
+          <p:cNvSpPr>
+            <a:spLocks noGrp="1"/>
+          </p:cNvSpPr>
+          <p:nvPr>
+            <p:ph type="sldNum" idx="5" sz="quarter"/>
+          </p:nvPr>
+        </p:nvSpPr>
+        <p:spPr/>
+      </p:sp>
+    </p:spTree>
+  </p:cSld>
+  <p:clrMapOvr>
+    <a:masterClrMapping/>
+  </p:clrMapOvr>
+</p:notes>
+</file>
+
+<file path=ppt/notesSlides/notesSlide11.xml><?xml version="1.0" encoding="utf-8"?>
+<p:notes xmlns:a="http://schemas.openxmlformats.org/drawingml/2006/main" xmlns:p="http://schemas.openxmlformats.org/presentationml/2006/main" xmlns:r="http://schemas.openxmlformats.org/officeDocument/2006/relationships">
+  <p:cSld>
+    <p:spTree>
+      <p:nvGrpSpPr>
+        <p:cNvPr id="1" name=""/>
+        <p:cNvGrpSpPr/>
+        <p:nvPr/>
+      </p:nvGrpSpPr>
+      <p:grpSpPr>
+        <a:xfrm>
+          <a:off x="0" y="0"/>
+          <a:ext cx="0" cy="0"/>
+          <a:chOff x="0" y="0"/>
+          <a:chExt cx="0" cy="0"/>
+        </a:xfrm>
+      </p:grpSpPr>
+      <p:sp>
+        <p:nvSpPr>
+          <p:cNvPr id="2" name="Slide Image Placeholder 1"/>
+          <p:cNvSpPr>
+            <a:spLocks noGrp="1"/>
+          </p:cNvSpPr>
+          <p:nvPr>
+            <p:ph type="sldImg" idx="2"/>
+          </p:nvPr>
+        </p:nvSpPr>
+        <p:spPr/>
+      </p:sp>
+      <p:sp>
+        <p:nvSpPr>
+          <p:cNvPr id="3" name="Notes Placeholder 2"/>
+          <p:cNvSpPr>
+            <a:spLocks noGrp="1"/>
+          </p:cNvSpPr>
+          <p:nvPr>
+            <p:ph type="body" idx="3" sz="quarter"/>
+          </p:nvPr>
+        </p:nvSpPr>
+        <p:spPr/>
+        <p:txBody>
+          <a:bodyPr/>
+          <a:lstStyle/>
+          <a:p>
+            <a:r>
+              <a:t>Explore the Android app, source code, and reviewer guide through the submission links. Move for yourself. Move together for nature.</a:t>
             </a:r>
           </a:p>
         </p:txBody>
@@ -1141,7 +1212,7 @@
           <a:lstStyle/>
           <a:p>
             <a:r>
-              <a:t>Wild Guardians connect your progress with conservation learning. Local community pilots, paid event services, and separately tracked conservation contributions are planned.</a:t>
+              <a:t>Wild Guardians connect your progress with conservation learning. Local community pilots are planned. No partnership or donation is claimed.</a:t>
             </a:r>
           </a:p>
         </p:txBody>
@@ -4283,7 +4354,7 @@
                 </a:solidFill>
                 <a:latin typeface="Arial"/>
               </a:rPr>
-              <a:t>01 / 10</a:t>
+              <a:t>01 / 11</a:t>
             </a:r>
           </a:p>
         </p:txBody>
@@ -4756,7 +4827,1255 @@
                 </a:solidFill>
                 <a:latin typeface="Arial"/>
               </a:rPr>
-              <a:t>10 / 10</a:t>
+              <a:t>10 / 11</a:t>
+            </a:r>
+          </a:p>
+        </p:txBody>
+      </p:sp>
+      <p:sp>
+        <p:nvSpPr>
+          <p:cNvPr id="5" name="TextBox 4"/>
+          <p:cNvSpPr txBox="1"/>
+          <p:nvPr/>
+        </p:nvSpPr>
+        <p:spPr>
+          <a:xfrm>
+            <a:off x="508000" y="1206500"/>
+            <a:ext cx="11176000" cy="1143000"/>
+          </a:xfrm>
+          <a:prstGeom prst="rect">
+            <a:avLst/>
+          </a:prstGeom>
+          <a:noFill/>
+        </p:spPr>
+        <p:txBody>
+          <a:bodyPr wrap="none" lIns="0" rIns="0" tIns="0" bIns="0">
+            <a:spAutoFit/>
+          </a:bodyPr>
+          <a:lstStyle/>
+          <a:p>
+            <a:pPr>
+              <a:lnSpc>
+                <a:spcPts val="4300"/>
+              </a:lnSpc>
+              <a:spcBef>
+                <a:spcPts val="0"/>
+              </a:spcBef>
+              <a:spcAft>
+                <a:spcPts val="0"/>
+              </a:spcAft>
+            </a:pPr>
+            <a:r>
+              <a:rPr sz="3500" b="1">
+                <a:solidFill>
+                  <a:srgbClr val="F3F7FF"/>
+                </a:solidFill>
+                <a:latin typeface="Arial"/>
+              </a:rPr>
+              <a:t>Next: stake SKR.</a:t>
+            </a:r>
+          </a:p>
+          <a:p>
+            <a:pPr>
+              <a:lnSpc>
+                <a:spcPts val="4300"/>
+              </a:lnSpc>
+              <a:spcBef>
+                <a:spcPts val="0"/>
+              </a:spcBef>
+              <a:spcAft>
+                <a:spcPts val="0"/>
+              </a:spcAft>
+            </a:pPr>
+            <a:r>
+              <a:rPr sz="3500" b="1">
+                <a:solidFill>
+                  <a:srgbClr val="F3F7FF"/>
+                </a:solidFill>
+                <a:latin typeface="Arial"/>
+              </a:rPr>
+              <a:t>Boost by level.</a:t>
+            </a:r>
+          </a:p>
+        </p:txBody>
+      </p:sp>
+      <p:sp>
+        <p:nvSpPr>
+          <p:cNvPr id="6" name="TextBox 5"/>
+          <p:cNvSpPr txBox="1"/>
+          <p:nvPr/>
+        </p:nvSpPr>
+        <p:spPr>
+          <a:xfrm>
+            <a:off x="539750" y="2984500"/>
+            <a:ext cx="11176000" cy="889000"/>
+          </a:xfrm>
+          <a:prstGeom prst="rect">
+            <a:avLst/>
+          </a:prstGeom>
+          <a:noFill/>
+        </p:spPr>
+        <p:txBody>
+          <a:bodyPr wrap="none" lIns="0" rIns="0" tIns="0" bIns="0">
+            <a:spAutoFit/>
+          </a:bodyPr>
+          <a:lstStyle/>
+          <a:p>
+            <a:pPr>
+              <a:lnSpc>
+                <a:spcPts val="2200"/>
+              </a:lnSpc>
+              <a:spcBef>
+                <a:spcPts val="0"/>
+              </a:spcBef>
+              <a:spcAft>
+                <a:spcPts val="0"/>
+              </a:spcAft>
+            </a:pPr>
+            <a:r>
+              <a:rPr sz="1800" b="0">
+                <a:solidFill>
+                  <a:srgbClr val="A8B6CF"/>
+                </a:solidFill>
+                <a:latin typeface="Arial"/>
+              </a:rPr>
+              <a:t>Higher shoe levels earn higher boosts.</a:t>
+            </a:r>
+          </a:p>
+          <a:p>
+            <a:pPr>
+              <a:lnSpc>
+                <a:spcPts val="2200"/>
+              </a:lnSpc>
+              <a:spcBef>
+                <a:spcPts val="0"/>
+              </a:spcBef>
+              <a:spcAft>
+                <a:spcPts val="0"/>
+              </a:spcAft>
+            </a:pPr>
+            <a:r>
+              <a:rPr sz="1800" b="0">
+                <a:solidFill>
+                  <a:srgbClr val="A8B6CF"/>
+                </a:solidFill>
+                <a:latin typeface="Arial"/>
+              </a:rPr>
+              <a:t>A fixed share of staking rewards</a:t>
+            </a:r>
+          </a:p>
+          <a:p>
+            <a:pPr>
+              <a:lnSpc>
+                <a:spcPts val="2200"/>
+              </a:lnSpc>
+              <a:spcBef>
+                <a:spcPts val="0"/>
+              </a:spcBef>
+              <a:spcAft>
+                <a:spcPts val="0"/>
+              </a:spcAft>
+            </a:pPr>
+            <a:r>
+              <a:rPr sz="1800" b="0">
+                <a:solidFill>
+                  <a:srgbClr val="A8B6CF"/>
+                </a:solidFill>
+                <a:latin typeface="Arial"/>
+              </a:rPr>
+              <a:t>funds wildlife conservation.</a:t>
+            </a:r>
+          </a:p>
+        </p:txBody>
+      </p:sp>
+      <p:sp>
+        <p:nvSpPr>
+          <p:cNvPr id="7" name="TextBox 6"/>
+          <p:cNvSpPr txBox="1"/>
+          <p:nvPr/>
+        </p:nvSpPr>
+        <p:spPr>
+          <a:xfrm>
+            <a:off x="539750" y="4127500"/>
+            <a:ext cx="11176000" cy="247649"/>
+          </a:xfrm>
+          <a:prstGeom prst="rect">
+            <a:avLst/>
+          </a:prstGeom>
+          <a:noFill/>
+        </p:spPr>
+        <p:txBody>
+          <a:bodyPr wrap="none" lIns="0" rIns="0" tIns="0" bIns="0">
+            <a:spAutoFit/>
+          </a:bodyPr>
+          <a:lstStyle/>
+          <a:p>
+            <a:pPr>
+              <a:lnSpc>
+                <a:spcPts val="1550"/>
+              </a:lnSpc>
+              <a:spcBef>
+                <a:spcPts val="0"/>
+              </a:spcBef>
+              <a:spcAft>
+                <a:spcPts val="0"/>
+              </a:spcAft>
+            </a:pPr>
+            <a:r>
+              <a:rPr sz="1250" b="1">
+                <a:solidFill>
+                  <a:srgbClr val="35E5C5"/>
+                </a:solidFill>
+                <a:latin typeface="Arial"/>
+              </a:rPr>
+              <a:t>ROADMAP  ·  NOT LIVE  ·  RATES NOT FINAL</a:t>
+            </a:r>
+          </a:p>
+        </p:txBody>
+      </p:sp>
+      <p:sp>
+        <p:nvSpPr>
+          <p:cNvPr id="8" name="TextBox 7"/>
+          <p:cNvSpPr txBox="1"/>
+          <p:nvPr/>
+        </p:nvSpPr>
+        <p:spPr>
+          <a:xfrm>
+            <a:off x="7810499" y="1016000"/>
+            <a:ext cx="3810000" cy="241300"/>
+          </a:xfrm>
+          <a:prstGeom prst="rect">
+            <a:avLst/>
+          </a:prstGeom>
+          <a:noFill/>
+        </p:spPr>
+        <p:txBody>
+          <a:bodyPr wrap="none" lIns="0" rIns="0" tIns="0" bIns="0">
+            <a:spAutoFit/>
+          </a:bodyPr>
+          <a:lstStyle/>
+          <a:p>
+            <a:pPr>
+              <a:lnSpc>
+                <a:spcPts val="1500"/>
+              </a:lnSpc>
+              <a:spcBef>
+                <a:spcPts val="0"/>
+              </a:spcBef>
+              <a:spcAft>
+                <a:spcPts val="0"/>
+              </a:spcAft>
+            </a:pPr>
+            <a:r>
+              <a:rPr sz="1200" b="1">
+                <a:solidFill>
+                  <a:srgbClr val="A8B6CF"/>
+                </a:solidFill>
+                <a:latin typeface="Arial"/>
+              </a:rPr>
+              <a:t>STAKING BOOST (ILLUSTRATIVE)</a:t>
+            </a:r>
+          </a:p>
+        </p:txBody>
+      </p:sp>
+      <p:sp>
+        <p:nvSpPr>
+          <p:cNvPr id="9" name="Rectangle 8"/>
+          <p:cNvSpPr/>
+          <p:nvPr/>
+        </p:nvSpPr>
+        <p:spPr>
+          <a:xfrm>
+            <a:off x="7810499" y="1301750"/>
+            <a:ext cx="3810000" cy="482600"/>
+          </a:xfrm>
+          <a:prstGeom prst="rect">
+            <a:avLst/>
+          </a:prstGeom>
+          <a:solidFill>
+            <a:srgbClr val="111A2B"/>
+          </a:solidFill>
+          <a:ln>
+            <a:noFill/>
+          </a:ln>
+        </p:spPr>
+        <p:style>
+          <a:lnRef idx="1">
+            <a:schemeClr val="accent1"/>
+          </a:lnRef>
+          <a:fillRef idx="3">
+            <a:schemeClr val="accent1"/>
+          </a:fillRef>
+          <a:effectRef idx="2">
+            <a:schemeClr val="accent1"/>
+          </a:effectRef>
+          <a:fontRef idx="minor">
+            <a:schemeClr val="lt1"/>
+          </a:fontRef>
+        </p:style>
+        <p:txBody>
+          <a:bodyPr rtlCol="0" anchor="ctr"/>
+          <a:lstStyle/>
+          <a:p>
+            <a:pPr algn="ctr"/>
+          </a:p>
+        </p:txBody>
+      </p:sp>
+      <p:sp>
+        <p:nvSpPr>
+          <p:cNvPr id="10" name="TextBox 9"/>
+          <p:cNvSpPr txBox="1"/>
+          <p:nvPr/>
+        </p:nvSpPr>
+        <p:spPr>
+          <a:xfrm>
+            <a:off x="8001000" y="1441450"/>
+            <a:ext cx="2095499" cy="260350"/>
+          </a:xfrm>
+          <a:prstGeom prst="rect">
+            <a:avLst/>
+          </a:prstGeom>
+          <a:noFill/>
+        </p:spPr>
+        <p:txBody>
+          <a:bodyPr wrap="none" lIns="0" rIns="0" tIns="0" bIns="0">
+            <a:spAutoFit/>
+          </a:bodyPr>
+          <a:lstStyle/>
+          <a:p>
+            <a:pPr>
+              <a:lnSpc>
+                <a:spcPts val="1650"/>
+              </a:lnSpc>
+              <a:spcBef>
+                <a:spcPts val="0"/>
+              </a:spcBef>
+              <a:spcAft>
+                <a:spcPts val="0"/>
+              </a:spcAft>
+            </a:pPr>
+            <a:r>
+              <a:rPr sz="1350" b="1">
+                <a:solidFill>
+                  <a:srgbClr val="F3F7FF"/>
+                </a:solidFill>
+                <a:latin typeface="Arial"/>
+              </a:rPr>
+              <a:t>LV.1  ORIGIN</a:t>
+            </a:r>
+          </a:p>
+        </p:txBody>
+      </p:sp>
+      <p:sp>
+        <p:nvSpPr>
+          <p:cNvPr id="11" name="TextBox 10"/>
+          <p:cNvSpPr txBox="1"/>
+          <p:nvPr/>
+        </p:nvSpPr>
+        <p:spPr>
+          <a:xfrm>
+            <a:off x="10795000" y="1441450"/>
+            <a:ext cx="698500" cy="260350"/>
+          </a:xfrm>
+          <a:prstGeom prst="rect">
+            <a:avLst/>
+          </a:prstGeom>
+          <a:noFill/>
+        </p:spPr>
+        <p:txBody>
+          <a:bodyPr wrap="none" lIns="0" rIns="0" tIns="0" bIns="0">
+            <a:spAutoFit/>
+          </a:bodyPr>
+          <a:lstStyle/>
+          <a:p>
+            <a:pPr>
+              <a:lnSpc>
+                <a:spcPts val="1650"/>
+              </a:lnSpc>
+              <a:spcBef>
+                <a:spcPts val="0"/>
+              </a:spcBef>
+              <a:spcAft>
+                <a:spcPts val="0"/>
+              </a:spcAft>
+            </a:pPr>
+            <a:r>
+              <a:rPr sz="1350" b="1">
+                <a:solidFill>
+                  <a:srgbClr val="35E5C5"/>
+                </a:solidFill>
+                <a:latin typeface="Arial"/>
+              </a:rPr>
+              <a:t>+5%</a:t>
+            </a:r>
+          </a:p>
+        </p:txBody>
+      </p:sp>
+      <p:sp>
+        <p:nvSpPr>
+          <p:cNvPr id="12" name="Rectangle 11"/>
+          <p:cNvSpPr/>
+          <p:nvPr/>
+        </p:nvSpPr>
+        <p:spPr>
+          <a:xfrm>
+            <a:off x="7810499" y="1885950"/>
+            <a:ext cx="3810000" cy="482600"/>
+          </a:xfrm>
+          <a:prstGeom prst="rect">
+            <a:avLst/>
+          </a:prstGeom>
+          <a:solidFill>
+            <a:srgbClr val="111A2B"/>
+          </a:solidFill>
+          <a:ln>
+            <a:noFill/>
+          </a:ln>
+        </p:spPr>
+        <p:style>
+          <a:lnRef idx="1">
+            <a:schemeClr val="accent1"/>
+          </a:lnRef>
+          <a:fillRef idx="3">
+            <a:schemeClr val="accent1"/>
+          </a:fillRef>
+          <a:effectRef idx="2">
+            <a:schemeClr val="accent1"/>
+          </a:effectRef>
+          <a:fontRef idx="minor">
+            <a:schemeClr val="lt1"/>
+          </a:fontRef>
+        </p:style>
+        <p:txBody>
+          <a:bodyPr rtlCol="0" anchor="ctr"/>
+          <a:lstStyle/>
+          <a:p>
+            <a:pPr algn="ctr"/>
+          </a:p>
+        </p:txBody>
+      </p:sp>
+      <p:sp>
+        <p:nvSpPr>
+          <p:cNvPr id="13" name="TextBox 12"/>
+          <p:cNvSpPr txBox="1"/>
+          <p:nvPr/>
+        </p:nvSpPr>
+        <p:spPr>
+          <a:xfrm>
+            <a:off x="8001000" y="2025650"/>
+            <a:ext cx="2095499" cy="260350"/>
+          </a:xfrm>
+          <a:prstGeom prst="rect">
+            <a:avLst/>
+          </a:prstGeom>
+          <a:noFill/>
+        </p:spPr>
+        <p:txBody>
+          <a:bodyPr wrap="none" lIns="0" rIns="0" tIns="0" bIns="0">
+            <a:spAutoFit/>
+          </a:bodyPr>
+          <a:lstStyle/>
+          <a:p>
+            <a:pPr>
+              <a:lnSpc>
+                <a:spcPts val="1650"/>
+              </a:lnSpc>
+              <a:spcBef>
+                <a:spcPts val="0"/>
+              </a:spcBef>
+              <a:spcAft>
+                <a:spcPts val="0"/>
+              </a:spcAft>
+            </a:pPr>
+            <a:r>
+              <a:rPr sz="1350" b="1">
+                <a:solidFill>
+                  <a:srgbClr val="F3F7FF"/>
+                </a:solidFill>
+                <a:latin typeface="Arial"/>
+              </a:rPr>
+              <a:t>LV.2</a:t>
+            </a:r>
+          </a:p>
+        </p:txBody>
+      </p:sp>
+      <p:sp>
+        <p:nvSpPr>
+          <p:cNvPr id="14" name="TextBox 13"/>
+          <p:cNvSpPr txBox="1"/>
+          <p:nvPr/>
+        </p:nvSpPr>
+        <p:spPr>
+          <a:xfrm>
+            <a:off x="10795000" y="2025650"/>
+            <a:ext cx="698500" cy="260350"/>
+          </a:xfrm>
+          <a:prstGeom prst="rect">
+            <a:avLst/>
+          </a:prstGeom>
+          <a:noFill/>
+        </p:spPr>
+        <p:txBody>
+          <a:bodyPr wrap="none" lIns="0" rIns="0" tIns="0" bIns="0">
+            <a:spAutoFit/>
+          </a:bodyPr>
+          <a:lstStyle/>
+          <a:p>
+            <a:pPr>
+              <a:lnSpc>
+                <a:spcPts val="1650"/>
+              </a:lnSpc>
+              <a:spcBef>
+                <a:spcPts val="0"/>
+              </a:spcBef>
+              <a:spcAft>
+                <a:spcPts val="0"/>
+              </a:spcAft>
+            </a:pPr>
+            <a:r>
+              <a:rPr sz="1350" b="1">
+                <a:solidFill>
+                  <a:srgbClr val="35E5C5"/>
+                </a:solidFill>
+                <a:latin typeface="Arial"/>
+              </a:rPr>
+              <a:t>+10%</a:t>
+            </a:r>
+          </a:p>
+        </p:txBody>
+      </p:sp>
+      <p:sp>
+        <p:nvSpPr>
+          <p:cNvPr id="15" name="Rectangle 14"/>
+          <p:cNvSpPr/>
+          <p:nvPr/>
+        </p:nvSpPr>
+        <p:spPr>
+          <a:xfrm>
+            <a:off x="7810499" y="2470150"/>
+            <a:ext cx="3810000" cy="482600"/>
+          </a:xfrm>
+          <a:prstGeom prst="rect">
+            <a:avLst/>
+          </a:prstGeom>
+          <a:solidFill>
+            <a:srgbClr val="111A2B"/>
+          </a:solidFill>
+          <a:ln>
+            <a:noFill/>
+          </a:ln>
+        </p:spPr>
+        <p:style>
+          <a:lnRef idx="1">
+            <a:schemeClr val="accent1"/>
+          </a:lnRef>
+          <a:fillRef idx="3">
+            <a:schemeClr val="accent1"/>
+          </a:fillRef>
+          <a:effectRef idx="2">
+            <a:schemeClr val="accent1"/>
+          </a:effectRef>
+          <a:fontRef idx="minor">
+            <a:schemeClr val="lt1"/>
+          </a:fontRef>
+        </p:style>
+        <p:txBody>
+          <a:bodyPr rtlCol="0" anchor="ctr"/>
+          <a:lstStyle/>
+          <a:p>
+            <a:pPr algn="ctr"/>
+          </a:p>
+        </p:txBody>
+      </p:sp>
+      <p:sp>
+        <p:nvSpPr>
+          <p:cNvPr id="16" name="TextBox 15"/>
+          <p:cNvSpPr txBox="1"/>
+          <p:nvPr/>
+        </p:nvSpPr>
+        <p:spPr>
+          <a:xfrm>
+            <a:off x="8001000" y="2609850"/>
+            <a:ext cx="2095499" cy="260350"/>
+          </a:xfrm>
+          <a:prstGeom prst="rect">
+            <a:avLst/>
+          </a:prstGeom>
+          <a:noFill/>
+        </p:spPr>
+        <p:txBody>
+          <a:bodyPr wrap="none" lIns="0" rIns="0" tIns="0" bIns="0">
+            <a:spAutoFit/>
+          </a:bodyPr>
+          <a:lstStyle/>
+          <a:p>
+            <a:pPr>
+              <a:lnSpc>
+                <a:spcPts val="1650"/>
+              </a:lnSpc>
+              <a:spcBef>
+                <a:spcPts val="0"/>
+              </a:spcBef>
+              <a:spcAft>
+                <a:spcPts val="0"/>
+              </a:spcAft>
+            </a:pPr>
+            <a:r>
+              <a:rPr sz="1350" b="1">
+                <a:solidFill>
+                  <a:srgbClr val="F3F7FF"/>
+                </a:solidFill>
+                <a:latin typeface="Arial"/>
+              </a:rPr>
+              <a:t>LV.3</a:t>
+            </a:r>
+          </a:p>
+        </p:txBody>
+      </p:sp>
+      <p:sp>
+        <p:nvSpPr>
+          <p:cNvPr id="17" name="TextBox 16"/>
+          <p:cNvSpPr txBox="1"/>
+          <p:nvPr/>
+        </p:nvSpPr>
+        <p:spPr>
+          <a:xfrm>
+            <a:off x="10795000" y="2609850"/>
+            <a:ext cx="698500" cy="260350"/>
+          </a:xfrm>
+          <a:prstGeom prst="rect">
+            <a:avLst/>
+          </a:prstGeom>
+          <a:noFill/>
+        </p:spPr>
+        <p:txBody>
+          <a:bodyPr wrap="none" lIns="0" rIns="0" tIns="0" bIns="0">
+            <a:spAutoFit/>
+          </a:bodyPr>
+          <a:lstStyle/>
+          <a:p>
+            <a:pPr>
+              <a:lnSpc>
+                <a:spcPts val="1650"/>
+              </a:lnSpc>
+              <a:spcBef>
+                <a:spcPts val="0"/>
+              </a:spcBef>
+              <a:spcAft>
+                <a:spcPts val="0"/>
+              </a:spcAft>
+            </a:pPr>
+            <a:r>
+              <a:rPr sz="1350" b="1">
+                <a:solidFill>
+                  <a:srgbClr val="35E5C5"/>
+                </a:solidFill>
+                <a:latin typeface="Arial"/>
+              </a:rPr>
+              <a:t>+15%</a:t>
+            </a:r>
+          </a:p>
+        </p:txBody>
+      </p:sp>
+      <p:sp>
+        <p:nvSpPr>
+          <p:cNvPr id="18" name="Rectangle 17"/>
+          <p:cNvSpPr/>
+          <p:nvPr/>
+        </p:nvSpPr>
+        <p:spPr>
+          <a:xfrm>
+            <a:off x="7810499" y="3054350"/>
+            <a:ext cx="3810000" cy="482600"/>
+          </a:xfrm>
+          <a:prstGeom prst="rect">
+            <a:avLst/>
+          </a:prstGeom>
+          <a:solidFill>
+            <a:srgbClr val="111A2B"/>
+          </a:solidFill>
+          <a:ln>
+            <a:noFill/>
+          </a:ln>
+        </p:spPr>
+        <p:style>
+          <a:lnRef idx="1">
+            <a:schemeClr val="accent1"/>
+          </a:lnRef>
+          <a:fillRef idx="3">
+            <a:schemeClr val="accent1"/>
+          </a:fillRef>
+          <a:effectRef idx="2">
+            <a:schemeClr val="accent1"/>
+          </a:effectRef>
+          <a:fontRef idx="minor">
+            <a:schemeClr val="lt1"/>
+          </a:fontRef>
+        </p:style>
+        <p:txBody>
+          <a:bodyPr rtlCol="0" anchor="ctr"/>
+          <a:lstStyle/>
+          <a:p>
+            <a:pPr algn="ctr"/>
+          </a:p>
+        </p:txBody>
+      </p:sp>
+      <p:sp>
+        <p:nvSpPr>
+          <p:cNvPr id="19" name="TextBox 18"/>
+          <p:cNvSpPr txBox="1"/>
+          <p:nvPr/>
+        </p:nvSpPr>
+        <p:spPr>
+          <a:xfrm>
+            <a:off x="8001000" y="3194050"/>
+            <a:ext cx="2095499" cy="260350"/>
+          </a:xfrm>
+          <a:prstGeom prst="rect">
+            <a:avLst/>
+          </a:prstGeom>
+          <a:noFill/>
+        </p:spPr>
+        <p:txBody>
+          <a:bodyPr wrap="none" lIns="0" rIns="0" tIns="0" bIns="0">
+            <a:spAutoFit/>
+          </a:bodyPr>
+          <a:lstStyle/>
+          <a:p>
+            <a:pPr>
+              <a:lnSpc>
+                <a:spcPts val="1650"/>
+              </a:lnSpc>
+              <a:spcBef>
+                <a:spcPts val="0"/>
+              </a:spcBef>
+              <a:spcAft>
+                <a:spcPts val="0"/>
+              </a:spcAft>
+            </a:pPr>
+            <a:r>
+              <a:rPr sz="1350" b="1">
+                <a:solidFill>
+                  <a:srgbClr val="F3F7FF"/>
+                </a:solidFill>
+                <a:latin typeface="Arial"/>
+              </a:rPr>
+              <a:t>LV.4</a:t>
+            </a:r>
+          </a:p>
+        </p:txBody>
+      </p:sp>
+      <p:sp>
+        <p:nvSpPr>
+          <p:cNvPr id="20" name="TextBox 19"/>
+          <p:cNvSpPr txBox="1"/>
+          <p:nvPr/>
+        </p:nvSpPr>
+        <p:spPr>
+          <a:xfrm>
+            <a:off x="10795000" y="3194050"/>
+            <a:ext cx="698500" cy="260350"/>
+          </a:xfrm>
+          <a:prstGeom prst="rect">
+            <a:avLst/>
+          </a:prstGeom>
+          <a:noFill/>
+        </p:spPr>
+        <p:txBody>
+          <a:bodyPr wrap="none" lIns="0" rIns="0" tIns="0" bIns="0">
+            <a:spAutoFit/>
+          </a:bodyPr>
+          <a:lstStyle/>
+          <a:p>
+            <a:pPr>
+              <a:lnSpc>
+                <a:spcPts val="1650"/>
+              </a:lnSpc>
+              <a:spcBef>
+                <a:spcPts val="0"/>
+              </a:spcBef>
+              <a:spcAft>
+                <a:spcPts val="0"/>
+              </a:spcAft>
+            </a:pPr>
+            <a:r>
+              <a:rPr sz="1350" b="1">
+                <a:solidFill>
+                  <a:srgbClr val="35E5C5"/>
+                </a:solidFill>
+                <a:latin typeface="Arial"/>
+              </a:rPr>
+              <a:t>+20%</a:t>
+            </a:r>
+          </a:p>
+        </p:txBody>
+      </p:sp>
+      <p:sp>
+        <p:nvSpPr>
+          <p:cNvPr id="21" name="Rectangle 20"/>
+          <p:cNvSpPr/>
+          <p:nvPr/>
+        </p:nvSpPr>
+        <p:spPr>
+          <a:xfrm>
+            <a:off x="7810499" y="3638550"/>
+            <a:ext cx="3810000" cy="482600"/>
+          </a:xfrm>
+          <a:prstGeom prst="rect">
+            <a:avLst/>
+          </a:prstGeom>
+          <a:solidFill>
+            <a:srgbClr val="111A2B"/>
+          </a:solidFill>
+          <a:ln>
+            <a:noFill/>
+          </a:ln>
+        </p:spPr>
+        <p:style>
+          <a:lnRef idx="1">
+            <a:schemeClr val="accent1"/>
+          </a:lnRef>
+          <a:fillRef idx="3">
+            <a:schemeClr val="accent1"/>
+          </a:fillRef>
+          <a:effectRef idx="2">
+            <a:schemeClr val="accent1"/>
+          </a:effectRef>
+          <a:fontRef idx="minor">
+            <a:schemeClr val="lt1"/>
+          </a:fontRef>
+        </p:style>
+        <p:txBody>
+          <a:bodyPr rtlCol="0" anchor="ctr"/>
+          <a:lstStyle/>
+          <a:p>
+            <a:pPr algn="ctr"/>
+          </a:p>
+        </p:txBody>
+      </p:sp>
+      <p:sp>
+        <p:nvSpPr>
+          <p:cNvPr id="22" name="TextBox 21"/>
+          <p:cNvSpPr txBox="1"/>
+          <p:nvPr/>
+        </p:nvSpPr>
+        <p:spPr>
+          <a:xfrm>
+            <a:off x="8001000" y="3778250"/>
+            <a:ext cx="2095499" cy="260350"/>
+          </a:xfrm>
+          <a:prstGeom prst="rect">
+            <a:avLst/>
+          </a:prstGeom>
+          <a:noFill/>
+        </p:spPr>
+        <p:txBody>
+          <a:bodyPr wrap="none" lIns="0" rIns="0" tIns="0" bIns="0">
+            <a:spAutoFit/>
+          </a:bodyPr>
+          <a:lstStyle/>
+          <a:p>
+            <a:pPr>
+              <a:lnSpc>
+                <a:spcPts val="1650"/>
+              </a:lnSpc>
+              <a:spcBef>
+                <a:spcPts val="0"/>
+              </a:spcBef>
+              <a:spcAft>
+                <a:spcPts val="0"/>
+              </a:spcAft>
+            </a:pPr>
+            <a:r>
+              <a:rPr sz="1350" b="1">
+                <a:solidFill>
+                  <a:srgbClr val="F3F7FF"/>
+                </a:solidFill>
+                <a:latin typeface="Arial"/>
+              </a:rPr>
+              <a:t>LV.5</a:t>
+            </a:r>
+          </a:p>
+        </p:txBody>
+      </p:sp>
+      <p:sp>
+        <p:nvSpPr>
+          <p:cNvPr id="23" name="TextBox 22"/>
+          <p:cNvSpPr txBox="1"/>
+          <p:nvPr/>
+        </p:nvSpPr>
+        <p:spPr>
+          <a:xfrm>
+            <a:off x="10795000" y="3778250"/>
+            <a:ext cx="698500" cy="260350"/>
+          </a:xfrm>
+          <a:prstGeom prst="rect">
+            <a:avLst/>
+          </a:prstGeom>
+          <a:noFill/>
+        </p:spPr>
+        <p:txBody>
+          <a:bodyPr wrap="none" lIns="0" rIns="0" tIns="0" bIns="0">
+            <a:spAutoFit/>
+          </a:bodyPr>
+          <a:lstStyle/>
+          <a:p>
+            <a:pPr>
+              <a:lnSpc>
+                <a:spcPts val="1650"/>
+              </a:lnSpc>
+              <a:spcBef>
+                <a:spcPts val="0"/>
+              </a:spcBef>
+              <a:spcAft>
+                <a:spcPts val="0"/>
+              </a:spcAft>
+            </a:pPr>
+            <a:r>
+              <a:rPr sz="1350" b="1">
+                <a:solidFill>
+                  <a:srgbClr val="35E5C5"/>
+                </a:solidFill>
+                <a:latin typeface="Arial"/>
+              </a:rPr>
+              <a:t>+25%</a:t>
+            </a:r>
+          </a:p>
+        </p:txBody>
+      </p:sp>
+      <p:sp>
+        <p:nvSpPr>
+          <p:cNvPr id="24" name="Rectangle 23"/>
+          <p:cNvSpPr/>
+          <p:nvPr/>
+        </p:nvSpPr>
+        <p:spPr>
+          <a:xfrm>
+            <a:off x="7810499" y="4311650"/>
+            <a:ext cx="3810000" cy="571500"/>
+          </a:xfrm>
+          <a:prstGeom prst="rect">
+            <a:avLst/>
+          </a:prstGeom>
+          <a:solidFill>
+            <a:srgbClr val="1B2A3F"/>
+          </a:solidFill>
+          <a:ln>
+            <a:noFill/>
+          </a:ln>
+        </p:spPr>
+        <p:style>
+          <a:lnRef idx="1">
+            <a:schemeClr val="accent1"/>
+          </a:lnRef>
+          <a:fillRef idx="3">
+            <a:schemeClr val="accent1"/>
+          </a:fillRef>
+          <a:effectRef idx="2">
+            <a:schemeClr val="accent1"/>
+          </a:effectRef>
+          <a:fontRef idx="minor">
+            <a:schemeClr val="lt1"/>
+          </a:fontRef>
+        </p:style>
+        <p:txBody>
+          <a:bodyPr rtlCol="0" anchor="ctr"/>
+          <a:lstStyle/>
+          <a:p>
+            <a:pPr algn="ctr"/>
+          </a:p>
+        </p:txBody>
+      </p:sp>
+      <p:sp>
+        <p:nvSpPr>
+          <p:cNvPr id="25" name="TextBox 24"/>
+          <p:cNvSpPr txBox="1"/>
+          <p:nvPr/>
+        </p:nvSpPr>
+        <p:spPr>
+          <a:xfrm>
+            <a:off x="8001000" y="4400550"/>
+            <a:ext cx="2667000" cy="241300"/>
+          </a:xfrm>
+          <a:prstGeom prst="rect">
+            <a:avLst/>
+          </a:prstGeom>
+          <a:noFill/>
+        </p:spPr>
+        <p:txBody>
+          <a:bodyPr wrap="none" lIns="0" rIns="0" tIns="0" bIns="0">
+            <a:spAutoFit/>
+          </a:bodyPr>
+          <a:lstStyle/>
+          <a:p>
+            <a:pPr>
+              <a:lnSpc>
+                <a:spcPts val="1500"/>
+              </a:lnSpc>
+              <a:spcBef>
+                <a:spcPts val="0"/>
+              </a:spcBef>
+              <a:spcAft>
+                <a:spcPts val="0"/>
+              </a:spcAft>
+            </a:pPr>
+            <a:r>
+              <a:rPr sz="1200" b="1">
+                <a:solidFill>
+                  <a:srgbClr val="FFD080"/>
+                </a:solidFill>
+                <a:latin typeface="Arial"/>
+              </a:rPr>
+              <a:t>CONSERVATION SHARE</a:t>
+            </a:r>
+          </a:p>
+        </p:txBody>
+      </p:sp>
+      <p:sp>
+        <p:nvSpPr>
+          <p:cNvPr id="26" name="TextBox 25"/>
+          <p:cNvSpPr txBox="1"/>
+          <p:nvPr/>
+        </p:nvSpPr>
+        <p:spPr>
+          <a:xfrm>
+            <a:off x="8001000" y="4629150"/>
+            <a:ext cx="3302000" cy="241300"/>
+          </a:xfrm>
+          <a:prstGeom prst="rect">
+            <a:avLst/>
+          </a:prstGeom>
+          <a:noFill/>
+        </p:spPr>
+        <p:txBody>
+          <a:bodyPr wrap="none" lIns="0" rIns="0" tIns="0" bIns="0">
+            <a:spAutoFit/>
+          </a:bodyPr>
+          <a:lstStyle/>
+          <a:p>
+            <a:pPr>
+              <a:lnSpc>
+                <a:spcPts val="1500"/>
+              </a:lnSpc>
+              <a:spcBef>
+                <a:spcPts val="0"/>
+              </a:spcBef>
+              <a:spcAft>
+                <a:spcPts val="0"/>
+              </a:spcAft>
+            </a:pPr>
+            <a:r>
+              <a:rPr sz="1200" b="0">
+                <a:solidFill>
+                  <a:srgbClr val="F3F7FF"/>
+                </a:solidFill>
+                <a:latin typeface="Arial"/>
+              </a:rPr>
+              <a:t>10% of staking rewards</a:t>
+            </a:r>
+          </a:p>
+        </p:txBody>
+      </p:sp>
+      <p:sp>
+        <p:nvSpPr>
+          <p:cNvPr id="27" name="TextBox 26"/>
+          <p:cNvSpPr txBox="1"/>
+          <p:nvPr/>
+        </p:nvSpPr>
+        <p:spPr>
+          <a:xfrm>
+            <a:off x="539750" y="5353050"/>
+            <a:ext cx="11112500" cy="247649"/>
+          </a:xfrm>
+          <a:prstGeom prst="rect">
+            <a:avLst/>
+          </a:prstGeom>
+          <a:noFill/>
+        </p:spPr>
+        <p:txBody>
+          <a:bodyPr wrap="none" lIns="0" rIns="0" tIns="0" bIns="0">
+            <a:spAutoFit/>
+          </a:bodyPr>
+          <a:lstStyle/>
+          <a:p>
+            <a:pPr>
+              <a:lnSpc>
+                <a:spcPts val="1550"/>
+              </a:lnSpc>
+              <a:spcBef>
+                <a:spcPts val="0"/>
+              </a:spcBef>
+              <a:spcAft>
+                <a:spcPts val="0"/>
+              </a:spcAft>
+            </a:pPr>
+            <a:r>
+              <a:rPr sz="1250" b="1">
+                <a:solidFill>
+                  <a:srgbClr val="FFD080"/>
+                </a:solidFill>
+                <a:latin typeface="Arial"/>
+              </a:rPr>
+              <a:t>PLANNED · NOT IMPLEMENTED</a:t>
+            </a:r>
+          </a:p>
+        </p:txBody>
+      </p:sp>
+    </p:spTree>
+  </p:cSld>
+  <p:clrMapOvr>
+    <a:masterClrMapping/>
+  </p:clrMapOvr>
+</p:sld>
+</file>
+
+<file path=ppt/slides/slide11.xml><?xml version="1.0" encoding="utf-8"?>
+<p:sld xmlns:a="http://schemas.openxmlformats.org/drawingml/2006/main" xmlns:p="http://schemas.openxmlformats.org/presentationml/2006/main" xmlns:r="http://schemas.openxmlformats.org/officeDocument/2006/relationships">
+  <p:cSld>
+    <p:bg>
+      <p:bgPr>
+        <a:solidFill>
+          <a:srgbClr val="070B16"/>
+        </a:solidFill>
+        <a:effectLst/>
+      </p:bgPr>
+    </p:bg>
+    <p:spTree>
+      <p:nvGrpSpPr>
+        <p:cNvPr id="1" name=""/>
+        <p:cNvGrpSpPr/>
+        <p:nvPr/>
+      </p:nvGrpSpPr>
+      <p:grpSpPr/>
+      <p:sp>
+        <p:nvSpPr>
+          <p:cNvPr id="2" name="Rectangle 1"/>
+          <p:cNvSpPr/>
+          <p:nvPr/>
+        </p:nvSpPr>
+        <p:spPr>
+          <a:xfrm>
+            <a:off x="508000" y="412750"/>
+            <a:ext cx="50800" cy="158750"/>
+          </a:xfrm>
+          <a:prstGeom prst="rect">
+            <a:avLst/>
+          </a:prstGeom>
+          <a:solidFill>
+            <a:srgbClr val="35E5C5"/>
+          </a:solidFill>
+          <a:ln>
+            <a:noFill/>
+          </a:ln>
+        </p:spPr>
+        <p:style>
+          <a:lnRef idx="1">
+            <a:schemeClr val="accent1"/>
+          </a:lnRef>
+          <a:fillRef idx="3">
+            <a:schemeClr val="accent1"/>
+          </a:fillRef>
+          <a:effectRef idx="2">
+            <a:schemeClr val="accent1"/>
+          </a:effectRef>
+          <a:fontRef idx="minor">
+            <a:schemeClr val="lt1"/>
+          </a:fontRef>
+        </p:style>
+        <p:txBody>
+          <a:bodyPr rtlCol="0" anchor="ctr"/>
+          <a:lstStyle/>
+          <a:p>
+            <a:pPr algn="ctr"/>
+          </a:p>
+        </p:txBody>
+      </p:sp>
+      <p:sp>
+        <p:nvSpPr>
+          <p:cNvPr id="3" name="TextBox 2"/>
+          <p:cNvSpPr txBox="1"/>
+          <p:nvPr/>
+        </p:nvSpPr>
+        <p:spPr>
+          <a:xfrm>
+            <a:off x="698500" y="412750"/>
+            <a:ext cx="6985000" cy="254000"/>
+          </a:xfrm>
+          <a:prstGeom prst="rect">
+            <a:avLst/>
+          </a:prstGeom>
+          <a:noFill/>
+        </p:spPr>
+        <p:txBody>
+          <a:bodyPr wrap="none" lIns="0" rIns="0" tIns="0" bIns="0">
+            <a:spAutoFit/>
+          </a:bodyPr>
+          <a:lstStyle/>
+          <a:p>
+            <a:pPr>
+              <a:lnSpc>
+                <a:spcPts val="1600"/>
+              </a:lnSpc>
+              <a:spcBef>
+                <a:spcPts val="0"/>
+              </a:spcBef>
+              <a:spcAft>
+                <a:spcPts val="0"/>
+              </a:spcAft>
+            </a:pPr>
+            <a:r>
+              <a:rPr sz="1300" b="1">
+                <a:solidFill>
+                  <a:srgbClr val="35E5C5"/>
+                </a:solidFill>
+                <a:latin typeface="Arial"/>
+              </a:rPr>
+              <a:t>NEONSHIFT  /  E</a:t>
+            </a:r>
+          </a:p>
+        </p:txBody>
+      </p:sp>
+      <p:sp>
+        <p:nvSpPr>
+          <p:cNvPr id="4" name="TextBox 3"/>
+          <p:cNvSpPr txBox="1"/>
+          <p:nvPr/>
+        </p:nvSpPr>
+        <p:spPr>
+          <a:xfrm>
+            <a:off x="10795000" y="412750"/>
+            <a:ext cx="952500" cy="254000"/>
+          </a:xfrm>
+          <a:prstGeom prst="rect">
+            <a:avLst/>
+          </a:prstGeom>
+          <a:noFill/>
+        </p:spPr>
+        <p:txBody>
+          <a:bodyPr wrap="none" lIns="0" rIns="0" tIns="0" bIns="0">
+            <a:spAutoFit/>
+          </a:bodyPr>
+          <a:lstStyle/>
+          <a:p>
+            <a:pPr>
+              <a:lnSpc>
+                <a:spcPts val="1600"/>
+              </a:lnSpc>
+              <a:spcBef>
+                <a:spcPts val="0"/>
+              </a:spcBef>
+              <a:spcAft>
+                <a:spcPts val="0"/>
+              </a:spcAft>
+            </a:pPr>
+            <a:r>
+              <a:rPr sz="1300" b="0">
+                <a:solidFill>
+                  <a:srgbClr val="A8B6CF"/>
+                </a:solidFill>
+                <a:latin typeface="Arial"/>
+              </a:rPr>
+              <a:t>11 / 11</a:t>
             </a:r>
           </a:p>
         </p:txBody>
@@ -5139,7 +6458,7 @@
                 </a:solidFill>
                 <a:latin typeface="Arial"/>
               </a:rPr>
-              <a:t>02 / 10</a:t>
+              <a:t>02 / 11</a:t>
             </a:r>
           </a:p>
         </p:txBody>
@@ -5921,7 +7240,7 @@
                 </a:solidFill>
                 <a:latin typeface="Arial"/>
               </a:rPr>
-              <a:t>03 / 10</a:t>
+              <a:t>03 / 11</a:t>
             </a:r>
           </a:p>
         </p:txBody>
@@ -6394,7 +7713,7 @@
                 </a:solidFill>
                 <a:latin typeface="Arial"/>
               </a:rPr>
-              <a:t>04 / 10</a:t>
+              <a:t>04 / 11</a:t>
             </a:r>
           </a:p>
         </p:txBody>
@@ -6889,7 +8208,7 @@
                 </a:solidFill>
                 <a:latin typeface="Arial"/>
               </a:rPr>
-              <a:t>05 / 10</a:t>
+              <a:t>05 / 11</a:t>
             </a:r>
           </a:p>
         </p:txBody>
@@ -7671,7 +8990,7 @@
                 </a:solidFill>
                 <a:latin typeface="Arial"/>
               </a:rPr>
-              <a:t>06 / 10</a:t>
+              <a:t>06 / 11</a:t>
             </a:r>
           </a:p>
         </p:txBody>
@@ -8166,7 +9485,7 @@
                 </a:solidFill>
                 <a:latin typeface="Arial"/>
               </a:rPr>
-              <a:t>07 / 10</a:t>
+              <a:t>07 / 11</a:t>
             </a:r>
           </a:p>
         </p:txBody>
@@ -8661,7 +9980,7 @@
                 </a:solidFill>
                 <a:latin typeface="Arial"/>
               </a:rPr>
-              <a:t>08 / 10</a:t>
+              <a:t>08 / 11</a:t>
             </a:r>
           </a:p>
         </p:txBody>
@@ -9156,7 +10475,7 @@
                 </a:solidFill>
                 <a:latin typeface="Arial"/>
               </a:rPr>
-              <a:t>09 / 10</a:t>
+              <a:t>09 / 11</a:t>
             </a:r>
           </a:p>
         </p:txBody>

--- a/output/hackathon-flexclip-en/flexclip-v4/NeonShift_FlexClip_v4_EN.pptx
+++ b/output/hackathon-flexclip-en/flexclip-v4/NeonShift_FlexClip_v4_EN.pptx
@@ -5206,7 +5206,7 @@
                 </a:solidFill>
                 <a:latin typeface="Arial"/>
               </a:rPr>
-              <a:t>+5%</a:t>
+              <a:t>0%</a:t>
             </a:r>
           </a:p>
         </p:txBody>
@@ -5339,7 +5339,7 @@
                 </a:solidFill>
                 <a:latin typeface="Arial"/>
               </a:rPr>
-              <a:t>+10%</a:t>
+              <a:t>+3%</a:t>
             </a:r>
           </a:p>
         </p:txBody>
@@ -5472,7 +5472,7 @@
                 </a:solidFill>
                 <a:latin typeface="Arial"/>
               </a:rPr>
-              <a:t>+15%</a:t>
+              <a:t>+5%</a:t>
             </a:r>
           </a:p>
         </p:txBody>
@@ -5605,7 +5605,7 @@
                 </a:solidFill>
                 <a:latin typeface="Arial"/>
               </a:rPr>
-              <a:t>+20%</a:t>
+              <a:t>+7%</a:t>
             </a:r>
           </a:p>
         </p:txBody>
@@ -5738,7 +5738,7 @@
                 </a:solidFill>
                 <a:latin typeface="Arial"/>
               </a:rPr>
-              <a:t>+25%</a:t>
+              <a:t>+10%</a:t>
             </a:r>
           </a:p>
         </p:txBody>

--- a/output/hackathon-flexclip-en/flexclip-v4/NeonShift_FlexClip_v4_EN.pptx
+++ b/output/hackathon-flexclip-en/flexclip-v4/NeonShift_FlexClip_v4_EN.pptx
@@ -5206,7 +5206,7 @@
                 </a:solidFill>
                 <a:latin typeface="Arial"/>
               </a:rPr>
-              <a:t>0%</a:t>
+              <a:t>+1%</a:t>
             </a:r>
           </a:p>
         </p:txBody>

--- a/output/hackathon-flexclip-en/flexclip-v4/NeonShift_FlexClip_v4_EN.pptx
+++ b/output/hackathon-flexclip-en/flexclip-v4/NeonShift_FlexClip_v4_EN.pptx
@@ -582,7 +582,7 @@
           <a:lstStyle/>
           <a:p>
             <a:r>
-              <a:t>Next, stake SKR to boost mission rewards, with higher boosts at higher shoe levels. A fixed share of staking rewards will fund a separately tracked wildlife conservation pool. Rates are not final.</a:t>
+              <a:t>Next, stake SKR to boost daily mission rewards, with higher boosts at higher shoe levels. A fixed share of the boost will fund a separately tracked wildlife conservation pool. Rates are not final.</a:t>
             </a:r>
           </a:p>
         </p:txBody>
@@ -4939,6 +4939,28 @@
                 </a:solidFill>
                 <a:latin typeface="Arial"/>
               </a:rPr>
+              <a:t>Stake SKR to boost daily mission rewards.</a:t>
+            </a:r>
+          </a:p>
+          <a:p>
+            <a:pPr>
+              <a:lnSpc>
+                <a:spcPts val="2200"/>
+              </a:lnSpc>
+              <a:spcBef>
+                <a:spcPts val="0"/>
+              </a:spcBef>
+              <a:spcAft>
+                <a:spcPts val="0"/>
+              </a:spcAft>
+            </a:pPr>
+            <a:r>
+              <a:rPr sz="1800" b="0">
+                <a:solidFill>
+                  <a:srgbClr val="A8B6CF"/>
+                </a:solidFill>
+                <a:latin typeface="Arial"/>
+              </a:rPr>
               <a:t>Higher shoe levels earn higher boosts.</a:t>
             </a:r>
           </a:p>
@@ -4961,29 +4983,7 @@
                 </a:solidFill>
                 <a:latin typeface="Arial"/>
               </a:rPr>
-              <a:t>A fixed share of staking rewards</a:t>
-            </a:r>
-          </a:p>
-          <a:p>
-            <a:pPr>
-              <a:lnSpc>
-                <a:spcPts val="2200"/>
-              </a:lnSpc>
-              <a:spcBef>
-                <a:spcPts val="0"/>
-              </a:spcBef>
-              <a:spcAft>
-                <a:spcPts val="0"/>
-              </a:spcAft>
-            </a:pPr>
-            <a:r>
-              <a:rPr sz="1800" b="0">
-                <a:solidFill>
-                  <a:srgbClr val="A8B6CF"/>
-                </a:solidFill>
-                <a:latin typeface="Arial"/>
-              </a:rPr>
-              <a:t>funds wildlife conservation.</a:t>
+              <a:t>10% of the boost goes to wildlife conservation.</a:t>
             </a:r>
           </a:p>
         </p:txBody>
@@ -5871,7 +5871,7 @@
                 </a:solidFill>
                 <a:latin typeface="Arial"/>
               </a:rPr>
-              <a:t>10% of staking rewards</a:t>
+              <a:t>10% of the boost</a:t>
             </a:r>
           </a:p>
         </p:txBody>
@@ -5916,7 +5916,7 @@
                 </a:solidFill>
                 <a:latin typeface="Arial"/>
               </a:rPr>
-              <a:t>PLANNED · NOT IMPLEMENTED</a:t>
+              <a:t>PLANNED · NOT IMPLEMENTED · NO RETURNS PROMISED</a:t>
             </a:r>
           </a:p>
         </p:txBody>
@@ -6177,8 +6177,8 @@
         </p:nvSpPr>
         <p:spPr>
           <a:xfrm>
-            <a:off x="539750" y="2984500"/>
-            <a:ext cx="11176000" cy="330200"/>
+            <a:off x="539750" y="3098800"/>
+            <a:ext cx="11176000" cy="609600"/>
           </a:xfrm>
           <a:prstGeom prst="rect">
             <a:avLst/>
@@ -6210,6 +6210,28 @@
                 <a:latin typeface="Arial"/>
               </a:rPr>
               <a:t>Explore NeonShift.</a:t>
+            </a:r>
+          </a:p>
+          <a:p>
+            <a:pPr>
+              <a:lnSpc>
+                <a:spcPts val="2200"/>
+              </a:lnSpc>
+              <a:spcBef>
+                <a:spcPts val="0"/>
+              </a:spcBef>
+              <a:spcAft>
+                <a:spcPts val="0"/>
+              </a:spcAft>
+            </a:pPr>
+            <a:r>
+              <a:rPr sz="1800" b="0">
+                <a:solidFill>
+                  <a:srgbClr val="A8B6CF"/>
+                </a:solidFill>
+                <a:latin typeface="Arial"/>
+              </a:rPr>
+              <a:t>github.com/stan0714/neonshift  ·  neonshift.cc</a:t>
             </a:r>
           </a:p>
         </p:txBody>
@@ -7892,7 +7914,7 @@
                 </a:solidFill>
                 <a:latin typeface="Arial"/>
               </a:rPr>
-              <a:t>STARTER SHOES + UPGRADES: FREE</a:t>
+              <a:t>STARTER SHOES + UPGRADES: NO PURCHASE NEEDED</a:t>
             </a:r>
           </a:p>
         </p:txBody>
@@ -10654,7 +10676,7 @@
                 </a:solidFill>
                 <a:latin typeface="Arial"/>
               </a:rPr>
-              <a:t>NEXT: LOCAL PILOTS</a:t>
+              <a:t>TODAY: SPECIES STORY CARDS</a:t>
             </a:r>
           </a:p>
         </p:txBody>

--- a/output/hackathon-flexclip-en/flexclip-v4/NeonShift_FlexClip_v4_EN.pptx
+++ b/output/hackathon-flexclip-en/flexclip-v4/NeonShift_FlexClip_v4_EN.pptx
@@ -4561,7 +4561,7 @@
       </p:sp>
       <p:pic>
         <p:nvPicPr>
-          <p:cNvPr id="9" name="Picture 8" descr="2026-10-02_c14_s01_home-top.png"/>
+          <p:cNvPr id="9" name="Picture 8" descr="2026-10-06_c21_s01_home-top.png"/>
           <p:cNvPicPr>
             <a:picLocks noChangeAspect="1"/>
           </p:cNvPicPr>
@@ -4623,7 +4623,7 @@
                 </a:solidFill>
                 <a:latin typeface="Arial"/>
               </a:rPr>
-              <a:t>DEVICE CAPTURE · OCT 02 · APK CODE 14</a:t>
+              <a:t>DEVICE CAPTURE · OCT 06 · APK CODE 21</a:t>
             </a:r>
           </a:p>
         </p:txBody>
@@ -7469,7 +7469,7 @@
       </p:sp>
       <p:pic>
         <p:nvPicPr>
-          <p:cNvPr id="9" name="Picture 8" descr="2026-10-02_c14_s04_summary-finished.png"/>
+          <p:cNvPr id="9" name="Picture 8" descr="2026-10-06_c21_s04_summary-6k.png"/>
           <p:cNvPicPr>
             <a:picLocks noChangeAspect="1"/>
           </p:cNvPicPr>
@@ -7531,7 +7531,7 @@
                 </a:solidFill>
                 <a:latin typeface="Arial"/>
               </a:rPr>
-              <a:t>DEVICE CAPTURE · OCT 02 · APK CODE 14</a:t>
+              <a:t>DEVICE CAPTURE · OCT 06 · APK CODE 21</a:t>
             </a:r>
           </a:p>
         </p:txBody>
@@ -7964,7 +7964,7 @@
       </p:sp>
       <p:pic>
         <p:nvPicPr>
-          <p:cNvPr id="9" name="Picture 8" descr="2026-10-02_c14_s04_profile-sync.png"/>
+          <p:cNvPr id="9" name="Picture 8" descr="2026-10-06_c21_s04_profile-sync.png"/>
           <p:cNvPicPr>
             <a:picLocks noChangeAspect="1"/>
           </p:cNvPicPr>
@@ -8026,7 +8026,7 @@
                 </a:solidFill>
                 <a:latin typeface="Arial"/>
               </a:rPr>
-              <a:t>DEVICE CAPTURE · OCT 02 · APK CODE 14</a:t>
+              <a:t>DEVICE CAPTURE · OCT 06 · APK CODE 21</a:t>
             </a:r>
           </a:p>
         </p:txBody>
@@ -8244,7 +8244,7 @@
         <p:spPr>
           <a:xfrm>
             <a:off x="508000" y="1206500"/>
-            <a:ext cx="11176000" cy="1143000"/>
+            <a:ext cx="5461000" cy="1143000"/>
           </a:xfrm>
           <a:prstGeom prst="rect">
             <a:avLst/>
@@ -8311,7 +8311,7 @@
         <p:spPr>
           <a:xfrm>
             <a:off x="539750" y="2984500"/>
-            <a:ext cx="11176000" cy="609600"/>
+            <a:ext cx="5461000" cy="609600"/>
           </a:xfrm>
           <a:prstGeom prst="rect">
             <a:avLst/>
@@ -8378,7 +8378,7 @@
         <p:spPr>
           <a:xfrm>
             <a:off x="539750" y="4127500"/>
-            <a:ext cx="11176000" cy="247649"/>
+            <a:ext cx="5461000" cy="247649"/>
           </a:xfrm>
           <a:prstGeom prst="rect">
             <a:avLst/>
@@ -8422,8 +8422,8 @@
         </p:nvSpPr>
         <p:spPr>
           <a:xfrm>
-            <a:off x="7810499" y="1492250"/>
-            <a:ext cx="3810000" cy="825500"/>
+            <a:off x="6096000" y="965200"/>
+            <a:ext cx="5588000" cy="4127500"/>
           </a:xfrm>
           <a:prstGeom prst="rect">
             <a:avLst/>
@@ -8457,16 +8457,88 @@
           </a:p>
         </p:txBody>
       </p:sp>
-      <p:sp>
-        <p:nvSpPr>
-          <p:cNvPr id="9" name="TextBox 8"/>
+      <p:pic>
+        <p:nvPicPr>
+          <p:cNvPr id="9" name="Picture 8" descr="2026-10-06_c21_s05_claim-1-wallet-approve.png"/>
+          <p:cNvPicPr>
+            <a:picLocks noChangeAspect="1"/>
+          </p:cNvPicPr>
+          <p:nvPr/>
+        </p:nvPicPr>
+        <p:blipFill>
+          <a:blip r:embed="rId2"/>
+          <a:stretch>
+            <a:fillRect/>
+          </a:stretch>
+        </p:blipFill>
+        <p:spPr>
+          <a:xfrm>
+            <a:off x="6191250" y="1104900"/>
+            <a:ext cx="1714500" cy="3816349"/>
+          </a:xfrm>
+          <a:prstGeom prst="rect">
+            <a:avLst/>
+          </a:prstGeom>
+        </p:spPr>
+      </p:pic>
+      <p:pic>
+        <p:nvPicPr>
+          <p:cNvPr id="10" name="Picture 9" descr="2026-10-06_c21_s05_claim-2-step-claimed.png"/>
+          <p:cNvPicPr>
+            <a:picLocks noChangeAspect="1"/>
+          </p:cNvPicPr>
+          <p:nvPr/>
+        </p:nvPicPr>
+        <p:blipFill>
+          <a:blip r:embed="rId3"/>
+          <a:stretch>
+            <a:fillRect/>
+          </a:stretch>
+        </p:blipFill>
+        <p:spPr>
+          <a:xfrm>
+            <a:off x="8001000" y="1104900"/>
+            <a:ext cx="1714500" cy="3816349"/>
+          </a:xfrm>
+          <a:prstGeom prst="rect">
+            <a:avLst/>
+          </a:prstGeom>
+        </p:spPr>
+      </p:pic>
+      <p:pic>
+        <p:nvPicPr>
+          <p:cNvPr id="11" name="Picture 10" descr="2026-10-06_c21_s05_claim-3-today-2of2.png"/>
+          <p:cNvPicPr>
+            <a:picLocks noChangeAspect="1"/>
+          </p:cNvPicPr>
+          <p:nvPr/>
+        </p:nvPicPr>
+        <p:blipFill>
+          <a:blip r:embed="rId4"/>
+          <a:stretch>
+            <a:fillRect/>
+          </a:stretch>
+        </p:blipFill>
+        <p:spPr>
+          <a:xfrm>
+            <a:off x="9810750" y="1104900"/>
+            <a:ext cx="1714500" cy="3816349"/>
+          </a:xfrm>
+          <a:prstGeom prst="rect">
+            <a:avLst/>
+          </a:prstGeom>
+        </p:spPr>
+      </p:pic>
+      <p:sp>
+        <p:nvSpPr>
+          <p:cNvPr id="12" name="TextBox 11"/>
           <p:cNvSpPr txBox="1"/>
           <p:nvPr/>
         </p:nvSpPr>
         <p:spPr>
           <a:xfrm>
-            <a:off x="8001000" y="1619250"/>
-            <a:ext cx="571500" cy="260350"/>
+            <a:off x="539750" y="4737100"/>
+            <a:ext cx="7112000" cy="247649"/>
           </a:xfrm>
           <a:prstGeom prst="rect">
             <a:avLst/>
@@ -8481,37 +8553,37 @@
           <a:p>
             <a:pPr>
               <a:lnSpc>
-                <a:spcPts val="1650"/>
-              </a:lnSpc>
-              <a:spcBef>
-                <a:spcPts val="0"/>
-              </a:spcBef>
-              <a:spcAft>
-                <a:spcPts val="0"/>
-              </a:spcAft>
-            </a:pPr>
-            <a:r>
-              <a:rPr sz="1350" b="1">
-                <a:solidFill>
-                  <a:srgbClr val="35E5C5"/>
-                </a:solidFill>
-                <a:latin typeface="Arial"/>
-              </a:rPr>
-              <a:t>01</a:t>
-            </a:r>
-          </a:p>
-        </p:txBody>
-      </p:sp>
-      <p:sp>
-        <p:nvSpPr>
-          <p:cNvPr id="10" name="TextBox 9"/>
+                <a:spcPts val="1550"/>
+              </a:lnSpc>
+              <a:spcBef>
+                <a:spcPts val="0"/>
+              </a:spcBef>
+              <a:spcAft>
+                <a:spcPts val="0"/>
+              </a:spcAft>
+            </a:pPr>
+            <a:r>
+              <a:rPr sz="1250" b="0">
+                <a:solidFill>
+                  <a:srgbClr val="FFD080"/>
+                </a:solidFill>
+                <a:latin typeface="Arial"/>
+              </a:rPr>
+              <a:t>DEVICE CAPTURE · OCT 06 · APK CODE 21</a:t>
+            </a:r>
+          </a:p>
+        </p:txBody>
+      </p:sp>
+      <p:sp>
+        <p:nvSpPr>
+          <p:cNvPr id="13" name="TextBox 12"/>
           <p:cNvSpPr txBox="1"/>
           <p:nvPr/>
         </p:nvSpPr>
         <p:spPr>
           <a:xfrm>
-            <a:off x="8001000" y="1905000"/>
-            <a:ext cx="3397250" cy="247649"/>
+            <a:off x="539750" y="5353050"/>
+            <a:ext cx="11112500" cy="247649"/>
           </a:xfrm>
           <a:prstGeom prst="rect">
             <a:avLst/>
@@ -8538,322 +8610,11 @@
             <a:r>
               <a:rPr sz="1250" b="1">
                 <a:solidFill>
-                  <a:srgbClr val="F3F7FF"/>
-                </a:solidFill>
-                <a:latin typeface="Arial"/>
-              </a:rPr>
-              <a:t>QUALIFYING SUMMARY</a:t>
-            </a:r>
-          </a:p>
-        </p:txBody>
-      </p:sp>
-      <p:sp>
-        <p:nvSpPr>
-          <p:cNvPr id="11" name="Rectangle 10"/>
-          <p:cNvSpPr/>
-          <p:nvPr/>
-        </p:nvSpPr>
-        <p:spPr>
-          <a:xfrm>
-            <a:off x="7810499" y="2584450"/>
-            <a:ext cx="3810000" cy="825500"/>
-          </a:xfrm>
-          <a:prstGeom prst="rect">
-            <a:avLst/>
-          </a:prstGeom>
-          <a:solidFill>
-            <a:srgbClr val="111A2B"/>
-          </a:solidFill>
-          <a:ln>
-            <a:noFill/>
-          </a:ln>
-        </p:spPr>
-        <p:style>
-          <a:lnRef idx="1">
-            <a:schemeClr val="accent1"/>
-          </a:lnRef>
-          <a:fillRef idx="3">
-            <a:schemeClr val="accent1"/>
-          </a:fillRef>
-          <a:effectRef idx="2">
-            <a:schemeClr val="accent1"/>
-          </a:effectRef>
-          <a:fontRef idx="minor">
-            <a:schemeClr val="lt1"/>
-          </a:fontRef>
-        </p:style>
-        <p:txBody>
-          <a:bodyPr rtlCol="0" anchor="ctr"/>
-          <a:lstStyle/>
-          <a:p>
-            <a:pPr algn="ctr"/>
-          </a:p>
-        </p:txBody>
-      </p:sp>
-      <p:sp>
-        <p:nvSpPr>
-          <p:cNvPr id="12" name="TextBox 11"/>
-          <p:cNvSpPr txBox="1"/>
-          <p:nvPr/>
-        </p:nvSpPr>
-        <p:spPr>
-          <a:xfrm>
-            <a:off x="8001000" y="2711450"/>
-            <a:ext cx="571500" cy="260350"/>
-          </a:xfrm>
-          <a:prstGeom prst="rect">
-            <a:avLst/>
-          </a:prstGeom>
-          <a:noFill/>
-        </p:spPr>
-        <p:txBody>
-          <a:bodyPr wrap="none" lIns="0" rIns="0" tIns="0" bIns="0">
-            <a:spAutoFit/>
-          </a:bodyPr>
-          <a:lstStyle/>
-          <a:p>
-            <a:pPr>
-              <a:lnSpc>
-                <a:spcPts val="1650"/>
-              </a:lnSpc>
-              <a:spcBef>
-                <a:spcPts val="0"/>
-              </a:spcBef>
-              <a:spcAft>
-                <a:spcPts val="0"/>
-              </a:spcAft>
-            </a:pPr>
-            <a:r>
-              <a:rPr sz="1350" b="1">
-                <a:solidFill>
-                  <a:srgbClr val="35E5C5"/>
-                </a:solidFill>
-                <a:latin typeface="Arial"/>
-              </a:rPr>
-              <a:t>02</a:t>
-            </a:r>
-          </a:p>
-        </p:txBody>
-      </p:sp>
-      <p:sp>
-        <p:nvSpPr>
-          <p:cNvPr id="13" name="TextBox 12"/>
-          <p:cNvSpPr txBox="1"/>
-          <p:nvPr/>
-        </p:nvSpPr>
-        <p:spPr>
-          <a:xfrm>
-            <a:off x="8001000" y="2997200"/>
-            <a:ext cx="3397250" cy="247649"/>
-          </a:xfrm>
-          <a:prstGeom prst="rect">
-            <a:avLst/>
-          </a:prstGeom>
-          <a:noFill/>
-        </p:spPr>
-        <p:txBody>
-          <a:bodyPr wrap="none" lIns="0" rIns="0" tIns="0" bIns="0">
-            <a:spAutoFit/>
-          </a:bodyPr>
-          <a:lstStyle/>
-          <a:p>
-            <a:pPr>
-              <a:lnSpc>
-                <a:spcPts val="1550"/>
-              </a:lnSpc>
-              <a:spcBef>
-                <a:spcPts val="0"/>
-              </a:spcBef>
-              <a:spcAft>
-                <a:spcPts val="0"/>
-              </a:spcAft>
-            </a:pPr>
-            <a:r>
-              <a:rPr sz="1250" b="1">
-                <a:solidFill>
-                  <a:srgbClr val="F3F7FF"/>
-                </a:solidFill>
-                <a:latin typeface="Arial"/>
-              </a:rPr>
-              <a:t>WALLET APPROVAL</a:t>
-            </a:r>
-          </a:p>
-        </p:txBody>
-      </p:sp>
-      <p:sp>
-        <p:nvSpPr>
-          <p:cNvPr id="14" name="Rectangle 13"/>
-          <p:cNvSpPr/>
-          <p:nvPr/>
-        </p:nvSpPr>
-        <p:spPr>
-          <a:xfrm>
-            <a:off x="7810499" y="3676649"/>
-            <a:ext cx="3810000" cy="825500"/>
-          </a:xfrm>
-          <a:prstGeom prst="rect">
-            <a:avLst/>
-          </a:prstGeom>
-          <a:solidFill>
-            <a:srgbClr val="111A2B"/>
-          </a:solidFill>
-          <a:ln>
-            <a:noFill/>
-          </a:ln>
-        </p:spPr>
-        <p:style>
-          <a:lnRef idx="1">
-            <a:schemeClr val="accent1"/>
-          </a:lnRef>
-          <a:fillRef idx="3">
-            <a:schemeClr val="accent1"/>
-          </a:fillRef>
-          <a:effectRef idx="2">
-            <a:schemeClr val="accent1"/>
-          </a:effectRef>
-          <a:fontRef idx="minor">
-            <a:schemeClr val="lt1"/>
-          </a:fontRef>
-        </p:style>
-        <p:txBody>
-          <a:bodyPr rtlCol="0" anchor="ctr"/>
-          <a:lstStyle/>
-          <a:p>
-            <a:pPr algn="ctr"/>
-          </a:p>
-        </p:txBody>
-      </p:sp>
-      <p:sp>
-        <p:nvSpPr>
-          <p:cNvPr id="15" name="TextBox 14"/>
-          <p:cNvSpPr txBox="1"/>
-          <p:nvPr/>
-        </p:nvSpPr>
-        <p:spPr>
-          <a:xfrm>
-            <a:off x="8001000" y="3803650"/>
-            <a:ext cx="571500" cy="260350"/>
-          </a:xfrm>
-          <a:prstGeom prst="rect">
-            <a:avLst/>
-          </a:prstGeom>
-          <a:noFill/>
-        </p:spPr>
-        <p:txBody>
-          <a:bodyPr wrap="none" lIns="0" rIns="0" tIns="0" bIns="0">
-            <a:spAutoFit/>
-          </a:bodyPr>
-          <a:lstStyle/>
-          <a:p>
-            <a:pPr>
-              <a:lnSpc>
-                <a:spcPts val="1650"/>
-              </a:lnSpc>
-              <a:spcBef>
-                <a:spcPts val="0"/>
-              </a:spcBef>
-              <a:spcAft>
-                <a:spcPts val="0"/>
-              </a:spcAft>
-            </a:pPr>
-            <a:r>
-              <a:rPr sz="1350" b="1">
-                <a:solidFill>
-                  <a:srgbClr val="35E5C5"/>
-                </a:solidFill>
-                <a:latin typeface="Arial"/>
-              </a:rPr>
-              <a:t>03</a:t>
-            </a:r>
-          </a:p>
-        </p:txBody>
-      </p:sp>
-      <p:sp>
-        <p:nvSpPr>
-          <p:cNvPr id="16" name="TextBox 15"/>
-          <p:cNvSpPr txBox="1"/>
-          <p:nvPr/>
-        </p:nvSpPr>
-        <p:spPr>
-          <a:xfrm>
-            <a:off x="8001000" y="4089400"/>
-            <a:ext cx="3397250" cy="247649"/>
-          </a:xfrm>
-          <a:prstGeom prst="rect">
-            <a:avLst/>
-          </a:prstGeom>
-          <a:noFill/>
-        </p:spPr>
-        <p:txBody>
-          <a:bodyPr wrap="none" lIns="0" rIns="0" tIns="0" bIns="0">
-            <a:spAutoFit/>
-          </a:bodyPr>
-          <a:lstStyle/>
-          <a:p>
-            <a:pPr>
-              <a:lnSpc>
-                <a:spcPts val="1550"/>
-              </a:lnSpc>
-              <a:spcBef>
-                <a:spcPts val="0"/>
-              </a:spcBef>
-              <a:spcAft>
-                <a:spcPts val="0"/>
-              </a:spcAft>
-            </a:pPr>
-            <a:r>
-              <a:rPr sz="1250" b="1">
-                <a:solidFill>
-                  <a:srgbClr val="F3F7FF"/>
-                </a:solidFill>
-                <a:latin typeface="Arial"/>
-              </a:rPr>
-              <a:t>DEVNET EXPLORER</a:t>
-            </a:r>
-          </a:p>
-        </p:txBody>
-      </p:sp>
-      <p:sp>
-        <p:nvSpPr>
-          <p:cNvPr id="17" name="TextBox 16"/>
-          <p:cNvSpPr txBox="1"/>
-          <p:nvPr/>
-        </p:nvSpPr>
-        <p:spPr>
-          <a:xfrm>
-            <a:off x="539750" y="5353050"/>
-            <a:ext cx="11112500" cy="247649"/>
-          </a:xfrm>
-          <a:prstGeom prst="rect">
-            <a:avLst/>
-          </a:prstGeom>
-          <a:noFill/>
-        </p:spPr>
-        <p:txBody>
-          <a:bodyPr wrap="none" lIns="0" rIns="0" tIns="0" bIns="0">
-            <a:spAutoFit/>
-          </a:bodyPr>
-          <a:lstStyle/>
-          <a:p>
-            <a:pPr>
-              <a:lnSpc>
-                <a:spcPts val="1550"/>
-              </a:lnSpc>
-              <a:spcBef>
-                <a:spcPts val="0"/>
-              </a:spcBef>
-              <a:spcAft>
-                <a:spcPts val="0"/>
-              </a:spcAft>
-            </a:pPr>
-            <a:r>
-              <a:rPr sz="1250" b="1">
-                <a:solidFill>
                   <a:srgbClr val="FFD080"/>
                 </a:solidFill>
                 <a:latin typeface="Arial"/>
               </a:rPr>
-              <a:t>WORKFLOW OVERVIEW</a:t>
+              <a:t>REAL CLAIM · TX 5QawZy2B… · DEVNET</a:t>
             </a:r>
           </a:p>
         </p:txBody>
@@ -9241,7 +9002,7 @@
       </p:sp>
       <p:pic>
         <p:nvPicPr>
-          <p:cNvPr id="9" name="Picture 8" descr="2026-10-02_c14_s06_nft-first5k-detail.png"/>
+          <p:cNvPr id="9" name="Picture 8" descr="2026-10-06_c21_s06_nft-first5k-detail.png"/>
           <p:cNvPicPr>
             <a:picLocks noChangeAspect="1"/>
           </p:cNvPicPr>
@@ -9303,7 +9064,7 @@
                 </a:solidFill>
                 <a:latin typeface="Arial"/>
               </a:rPr>
-              <a:t>DEVICE CAPTURE · OCT 02 · APK CODE 14</a:t>
+              <a:t>DEVICE CAPTURE · OCT 06 · APK CODE 21</a:t>
             </a:r>
           </a:p>
         </p:txBody>
@@ -10726,7 +10487,7 @@
       </p:sp>
       <p:pic>
         <p:nvPicPr>
-          <p:cNvPr id="9" name="Picture 8" descr="2026-10-02_c14_s09_elephant-habitat.png"/>
+          <p:cNvPr id="9" name="Picture 8" descr="2026-10-06_c21_s09_elephant-habitat.png"/>
           <p:cNvPicPr>
             <a:picLocks noChangeAspect="1"/>
           </p:cNvPicPr>
@@ -10788,7 +10549,7 @@
                 </a:solidFill>
                 <a:latin typeface="Arial"/>
               </a:rPr>
-              <a:t>DEVICE CAPTURE · OCT 02 · APK CODE 14</a:t>
+              <a:t>DEVICE CAPTURE · OCT 06 · APK CODE 21</a:t>
             </a:r>
           </a:p>
         </p:txBody>

--- a/output/hackathon-flexclip-en/flexclip-v4/NeonShift_FlexClip_v4_EN.pptx
+++ b/output/hackathon-flexclip-en/flexclip-v4/NeonShift_FlexClip_v4_EN.pptx
@@ -8459,7 +8459,7 @@
       </p:sp>
       <p:pic>
         <p:nvPicPr>
-          <p:cNvPr id="9" name="Picture 8" descr="2026-10-06_c21_s05_claim-1-wallet-approve.png"/>
+          <p:cNvPr id="9" name="Picture 8" descr="2026-10-07_c22_s05_claim-1-wallet-approve.png"/>
           <p:cNvPicPr>
             <a:picLocks noChangeAspect="1"/>
           </p:cNvPicPr>
@@ -8483,7 +8483,7 @@
       </p:pic>
       <p:pic>
         <p:nvPicPr>
-          <p:cNvPr id="10" name="Picture 9" descr="2026-10-06_c21_s05_claim-2-step-claimed.png"/>
+          <p:cNvPr id="10" name="Picture 9" descr="2026-10-07_c22_s05_claim-2-step-claimed.png"/>
           <p:cNvPicPr>
             <a:picLocks noChangeAspect="1"/>
           </p:cNvPicPr>
@@ -8507,7 +8507,7 @@
       </p:pic>
       <p:pic>
         <p:nvPicPr>
-          <p:cNvPr id="11" name="Picture 10" descr="2026-10-06_c21_s05_claim-3-today-2of2.png"/>
+          <p:cNvPr id="11" name="Picture 10" descr="2026-10-07_c22_s05_claim-3-home-35.png"/>
           <p:cNvPicPr>
             <a:picLocks noChangeAspect="1"/>
           </p:cNvPicPr>
@@ -8569,7 +8569,7 @@
                 </a:solidFill>
                 <a:latin typeface="Arial"/>
               </a:rPr>
-              <a:t>DEVICE CAPTURE · OCT 06 · APK CODE 21</a:t>
+              <a:t>DEVICE CAPTURE · OCT 07 · APK CODE 22</a:t>
             </a:r>
           </a:p>
         </p:txBody>
@@ -8614,7 +8614,7 @@
                 </a:solidFill>
                 <a:latin typeface="Arial"/>
               </a:rPr>
-              <a:t>REAL CLAIM · TX 5QawZy2B… · DEVNET</a:t>
+              <a:t>REAL CLAIM · TX 3PpfNbBr… · DEVNET</a:t>
             </a:r>
           </a:p>
         </p:txBody>
